--- a/lectures/L5.pptx
+++ b/lectures/L5.pptx
@@ -150,247 +150,6 @@
 <file path=ppt/changesInfos/changesInfo1.xml><?xml version="1.0" encoding="utf-8"?>
 <pc:chgInfo xmlns:a="http://schemas.openxmlformats.org/drawingml/2006/main" xmlns:r="http://schemas.openxmlformats.org/officeDocument/2006/relationships" xmlns:ac="http://schemas.microsoft.com/office/drawing/2013/main/command" xmlns:pc="http://schemas.microsoft.com/office/powerpoint/2013/main/command">
   <pc:docChgLst>
-    <pc:chgData name="Di Mattia Alessandro Edoardo Giorgio David" userId="f8954a66-e5ad-4a1c-9536-1d2117047f5f" providerId="ADAL" clId="{AC787D5D-10B8-4750-885F-805D7C9E9737}"/>
-    <pc:docChg chg="undo custSel addSld modSld">
-      <pc:chgData name="Di Mattia Alessandro Edoardo Giorgio David" userId="f8954a66-e5ad-4a1c-9536-1d2117047f5f" providerId="ADAL" clId="{AC787D5D-10B8-4750-885F-805D7C9E9737}" dt="2021-08-20T15:21:02.985" v="455" actId="20577"/>
-      <pc:docMkLst>
-        <pc:docMk/>
-      </pc:docMkLst>
-      <pc:sldChg chg="modSp new mod">
-        <pc:chgData name="Di Mattia Alessandro Edoardo Giorgio David" userId="f8954a66-e5ad-4a1c-9536-1d2117047f5f" providerId="ADAL" clId="{AC787D5D-10B8-4750-885F-805D7C9E9737}" dt="2021-08-20T14:45:37.819" v="298" actId="20577"/>
-        <pc:sldMkLst>
-          <pc:docMk/>
-          <pc:sldMk cId="3870998453" sldId="298"/>
-        </pc:sldMkLst>
-        <pc:spChg chg="mod">
-          <ac:chgData name="Di Mattia Alessandro Edoardo Giorgio David" userId="f8954a66-e5ad-4a1c-9536-1d2117047f5f" providerId="ADAL" clId="{AC787D5D-10B8-4750-885F-805D7C9E9737}" dt="2021-08-20T14:38:55.348" v="14" actId="122"/>
-          <ac:spMkLst>
-            <pc:docMk/>
-            <pc:sldMk cId="3870998453" sldId="298"/>
-            <ac:spMk id="2" creationId="{CC70B360-B3ED-43E5-A748-F5B5C403C878}"/>
-          </ac:spMkLst>
-        </pc:spChg>
-        <pc:spChg chg="mod">
-          <ac:chgData name="Di Mattia Alessandro Edoardo Giorgio David" userId="f8954a66-e5ad-4a1c-9536-1d2117047f5f" providerId="ADAL" clId="{AC787D5D-10B8-4750-885F-805D7C9E9737}" dt="2021-08-20T14:45:37.819" v="298" actId="20577"/>
-          <ac:spMkLst>
-            <pc:docMk/>
-            <pc:sldMk cId="3870998453" sldId="298"/>
-            <ac:spMk id="3" creationId="{7AB3AA8F-0BE3-46AB-A9D7-309F7F97E4C0}"/>
-          </ac:spMkLst>
-        </pc:spChg>
-      </pc:sldChg>
-      <pc:sldChg chg="addSp delSp modSp new mod modClrScheme chgLayout">
-        <pc:chgData name="Di Mattia Alessandro Edoardo Giorgio David" userId="f8954a66-e5ad-4a1c-9536-1d2117047f5f" providerId="ADAL" clId="{AC787D5D-10B8-4750-885F-805D7C9E9737}" dt="2021-08-20T14:46:06.034" v="304"/>
-        <pc:sldMkLst>
-          <pc:docMk/>
-          <pc:sldMk cId="316752284" sldId="299"/>
-        </pc:sldMkLst>
-        <pc:spChg chg="del">
-          <ac:chgData name="Di Mattia Alessandro Edoardo Giorgio David" userId="f8954a66-e5ad-4a1c-9536-1d2117047f5f" providerId="ADAL" clId="{AC787D5D-10B8-4750-885F-805D7C9E9737}" dt="2021-08-20T14:46:03.679" v="303" actId="700"/>
-          <ac:spMkLst>
-            <pc:docMk/>
-            <pc:sldMk cId="316752284" sldId="299"/>
-            <ac:spMk id="2" creationId="{D510B283-081F-43CE-96F6-08C288F3DFFB}"/>
-          </ac:spMkLst>
-        </pc:spChg>
-        <pc:spChg chg="del mod">
-          <ac:chgData name="Di Mattia Alessandro Edoardo Giorgio David" userId="f8954a66-e5ad-4a1c-9536-1d2117047f5f" providerId="ADAL" clId="{AC787D5D-10B8-4750-885F-805D7C9E9737}" dt="2021-08-20T14:46:03.679" v="303" actId="700"/>
-          <ac:spMkLst>
-            <pc:docMk/>
-            <pc:sldMk cId="316752284" sldId="299"/>
-            <ac:spMk id="3" creationId="{61373EFE-DB58-42AD-8DA9-E7D7FBC43DC0}"/>
-          </ac:spMkLst>
-        </pc:spChg>
-        <pc:picChg chg="add">
-          <ac:chgData name="Di Mattia Alessandro Edoardo Giorgio David" userId="f8954a66-e5ad-4a1c-9536-1d2117047f5f" providerId="ADAL" clId="{AC787D5D-10B8-4750-885F-805D7C9E9737}" dt="2021-08-20T14:46:06.034" v="304"/>
-          <ac:picMkLst>
-            <pc:docMk/>
-            <pc:sldMk cId="316752284" sldId="299"/>
-            <ac:picMk id="4" creationId="{34E6A750-E0B8-41C0-A1C7-288A84AD5D95}"/>
-          </ac:picMkLst>
-        </pc:picChg>
-      </pc:sldChg>
-      <pc:sldChg chg="addSp modSp new mod">
-        <pc:chgData name="Di Mattia Alessandro Edoardo Giorgio David" userId="f8954a66-e5ad-4a1c-9536-1d2117047f5f" providerId="ADAL" clId="{AC787D5D-10B8-4750-885F-805D7C9E9737}" dt="2021-08-20T14:51:41.672" v="307" actId="1076"/>
-        <pc:sldMkLst>
-          <pc:docMk/>
-          <pc:sldMk cId="3144966826" sldId="300"/>
-        </pc:sldMkLst>
-        <pc:picChg chg="add mod">
-          <ac:chgData name="Di Mattia Alessandro Edoardo Giorgio David" userId="f8954a66-e5ad-4a1c-9536-1d2117047f5f" providerId="ADAL" clId="{AC787D5D-10B8-4750-885F-805D7C9E9737}" dt="2021-08-20T14:51:41.672" v="307" actId="1076"/>
-          <ac:picMkLst>
-            <pc:docMk/>
-            <pc:sldMk cId="3144966826" sldId="300"/>
-            <ac:picMk id="2" creationId="{E613DE37-F2C5-40EB-9E94-3226883C95DB}"/>
-          </ac:picMkLst>
-        </pc:picChg>
-      </pc:sldChg>
-      <pc:sldChg chg="addSp modSp new mod modClrScheme chgLayout">
-        <pc:chgData name="Di Mattia Alessandro Edoardo Giorgio David" userId="f8954a66-e5ad-4a1c-9536-1d2117047f5f" providerId="ADAL" clId="{AC787D5D-10B8-4750-885F-805D7C9E9737}" dt="2021-08-20T15:09:51.424" v="406" actId="20577"/>
-        <pc:sldMkLst>
-          <pc:docMk/>
-          <pc:sldMk cId="941163814" sldId="301"/>
-        </pc:sldMkLst>
-        <pc:spChg chg="add mod">
-          <ac:chgData name="Di Mattia Alessandro Edoardo Giorgio David" userId="f8954a66-e5ad-4a1c-9536-1d2117047f5f" providerId="ADAL" clId="{AC787D5D-10B8-4750-885F-805D7C9E9737}" dt="2021-08-20T14:59:05.983" v="313" actId="122"/>
-          <ac:spMkLst>
-            <pc:docMk/>
-            <pc:sldMk cId="941163814" sldId="301"/>
-            <ac:spMk id="2" creationId="{03192228-75B4-4CBA-B91B-AFD69837867A}"/>
-          </ac:spMkLst>
-        </pc:spChg>
-        <pc:spChg chg="add mod">
-          <ac:chgData name="Di Mattia Alessandro Edoardo Giorgio David" userId="f8954a66-e5ad-4a1c-9536-1d2117047f5f" providerId="ADAL" clId="{AC787D5D-10B8-4750-885F-805D7C9E9737}" dt="2021-08-20T15:09:51.424" v="406" actId="20577"/>
-          <ac:spMkLst>
-            <pc:docMk/>
-            <pc:sldMk cId="941163814" sldId="301"/>
-            <ac:spMk id="3" creationId="{A954FACC-FED0-4D82-87FB-6B26DCE06EC6}"/>
-          </ac:spMkLst>
-        </pc:spChg>
-      </pc:sldChg>
-      <pc:sldChg chg="addSp delSp modSp new mod">
-        <pc:chgData name="Di Mattia Alessandro Edoardo Giorgio David" userId="f8954a66-e5ad-4a1c-9536-1d2117047f5f" providerId="ADAL" clId="{AC787D5D-10B8-4750-885F-805D7C9E9737}" dt="2021-08-20T15:00:15.602" v="322" actId="14100"/>
-        <pc:sldMkLst>
-          <pc:docMk/>
-          <pc:sldMk cId="1062955294" sldId="302"/>
-        </pc:sldMkLst>
-        <pc:spChg chg="mod">
-          <ac:chgData name="Di Mattia Alessandro Edoardo Giorgio David" userId="f8954a66-e5ad-4a1c-9536-1d2117047f5f" providerId="ADAL" clId="{AC787D5D-10B8-4750-885F-805D7C9E9737}" dt="2021-08-20T15:00:08.576" v="321" actId="122"/>
-          <ac:spMkLst>
-            <pc:docMk/>
-            <pc:sldMk cId="1062955294" sldId="302"/>
-            <ac:spMk id="2" creationId="{25EF509A-071D-411C-A0B0-D4208223146E}"/>
-          </ac:spMkLst>
-        </pc:spChg>
-        <pc:spChg chg="del">
-          <ac:chgData name="Di Mattia Alessandro Edoardo Giorgio David" userId="f8954a66-e5ad-4a1c-9536-1d2117047f5f" providerId="ADAL" clId="{AC787D5D-10B8-4750-885F-805D7C9E9737}" dt="2021-08-20T14:59:42.063" v="318"/>
-          <ac:spMkLst>
-            <pc:docMk/>
-            <pc:sldMk cId="1062955294" sldId="302"/>
-            <ac:spMk id="3" creationId="{BE19CB99-A33A-4A01-9905-9D0C3914D9D2}"/>
-          </ac:spMkLst>
-        </pc:spChg>
-        <pc:picChg chg="add mod">
-          <ac:chgData name="Di Mattia Alessandro Edoardo Giorgio David" userId="f8954a66-e5ad-4a1c-9536-1d2117047f5f" providerId="ADAL" clId="{AC787D5D-10B8-4750-885F-805D7C9E9737}" dt="2021-08-20T15:00:15.602" v="322" actId="14100"/>
-          <ac:picMkLst>
-            <pc:docMk/>
-            <pc:sldMk cId="1062955294" sldId="302"/>
-            <ac:picMk id="4" creationId="{5ED3C2D6-63C5-460B-A836-842FEB2B0177}"/>
-          </ac:picMkLst>
-        </pc:picChg>
-      </pc:sldChg>
-      <pc:sldChg chg="modSp new mod">
-        <pc:chgData name="Di Mattia Alessandro Edoardo Giorgio David" userId="f8954a66-e5ad-4a1c-9536-1d2117047f5f" providerId="ADAL" clId="{AC787D5D-10B8-4750-885F-805D7C9E9737}" dt="2021-08-20T15:09:36.335" v="398" actId="14"/>
-        <pc:sldMkLst>
-          <pc:docMk/>
-          <pc:sldMk cId="2044962240" sldId="303"/>
-        </pc:sldMkLst>
-        <pc:spChg chg="mod">
-          <ac:chgData name="Di Mattia Alessandro Edoardo Giorgio David" userId="f8954a66-e5ad-4a1c-9536-1d2117047f5f" providerId="ADAL" clId="{AC787D5D-10B8-4750-885F-805D7C9E9737}" dt="2021-08-20T15:00:32.711" v="325" actId="122"/>
-          <ac:spMkLst>
-            <pc:docMk/>
-            <pc:sldMk cId="2044962240" sldId="303"/>
-            <ac:spMk id="2" creationId="{29243411-1081-421F-B743-6D9D5E11545B}"/>
-          </ac:spMkLst>
-        </pc:spChg>
-        <pc:spChg chg="mod">
-          <ac:chgData name="Di Mattia Alessandro Edoardo Giorgio David" userId="f8954a66-e5ad-4a1c-9536-1d2117047f5f" providerId="ADAL" clId="{AC787D5D-10B8-4750-885F-805D7C9E9737}" dt="2021-08-20T15:09:36.335" v="398" actId="14"/>
-          <ac:spMkLst>
-            <pc:docMk/>
-            <pc:sldMk cId="2044962240" sldId="303"/>
-            <ac:spMk id="3" creationId="{2A3AA81C-414F-4D7B-9C0E-C805FF24F569}"/>
-          </ac:spMkLst>
-        </pc:spChg>
-      </pc:sldChg>
-      <pc:sldChg chg="addSp delSp modSp new mod">
-        <pc:chgData name="Di Mattia Alessandro Edoardo Giorgio David" userId="f8954a66-e5ad-4a1c-9536-1d2117047f5f" providerId="ADAL" clId="{AC787D5D-10B8-4750-885F-805D7C9E9737}" dt="2021-08-20T15:12:13.433" v="412"/>
-        <pc:sldMkLst>
-          <pc:docMk/>
-          <pc:sldMk cId="3567292898" sldId="304"/>
-        </pc:sldMkLst>
-        <pc:spChg chg="mod">
-          <ac:chgData name="Di Mattia Alessandro Edoardo Giorgio David" userId="f8954a66-e5ad-4a1c-9536-1d2117047f5f" providerId="ADAL" clId="{AC787D5D-10B8-4750-885F-805D7C9E9737}" dt="2021-08-20T15:10:13.213" v="409" actId="122"/>
-          <ac:spMkLst>
-            <pc:docMk/>
-            <pc:sldMk cId="3567292898" sldId="304"/>
-            <ac:spMk id="2" creationId="{B9A891B8-FCF3-4D10-8095-90B579A3DB40}"/>
-          </ac:spMkLst>
-        </pc:spChg>
-        <pc:spChg chg="add del">
-          <ac:chgData name="Di Mattia Alessandro Edoardo Giorgio David" userId="f8954a66-e5ad-4a1c-9536-1d2117047f5f" providerId="ADAL" clId="{AC787D5D-10B8-4750-885F-805D7C9E9737}" dt="2021-08-20T15:12:13.433" v="412"/>
-          <ac:spMkLst>
-            <pc:docMk/>
-            <pc:sldMk cId="3567292898" sldId="304"/>
-            <ac:spMk id="3" creationId="{DB645B7F-AD3D-4CAA-AD5D-BE21722A27B2}"/>
-          </ac:spMkLst>
-        </pc:spChg>
-        <pc:picChg chg="add del mod">
-          <ac:chgData name="Di Mattia Alessandro Edoardo Giorgio David" userId="f8954a66-e5ad-4a1c-9536-1d2117047f5f" providerId="ADAL" clId="{AC787D5D-10B8-4750-885F-805D7C9E9737}" dt="2021-08-20T15:11:48.619" v="411"/>
-          <ac:picMkLst>
-            <pc:docMk/>
-            <pc:sldMk cId="3567292898" sldId="304"/>
-            <ac:picMk id="4" creationId="{A0D49A57-9517-4AB9-A940-65FDCC83E125}"/>
-          </ac:picMkLst>
-        </pc:picChg>
-        <pc:picChg chg="add mod">
-          <ac:chgData name="Di Mattia Alessandro Edoardo Giorgio David" userId="f8954a66-e5ad-4a1c-9536-1d2117047f5f" providerId="ADAL" clId="{AC787D5D-10B8-4750-885F-805D7C9E9737}" dt="2021-08-20T15:12:13.433" v="412"/>
-          <ac:picMkLst>
-            <pc:docMk/>
-            <pc:sldMk cId="3567292898" sldId="304"/>
-            <ac:picMk id="5" creationId="{4596526A-0688-4381-B13F-22A6737478DA}"/>
-          </ac:picMkLst>
-        </pc:picChg>
-      </pc:sldChg>
-      <pc:sldChg chg="modSp new mod">
-        <pc:chgData name="Di Mattia Alessandro Edoardo Giorgio David" userId="f8954a66-e5ad-4a1c-9536-1d2117047f5f" providerId="ADAL" clId="{AC787D5D-10B8-4750-885F-805D7C9E9737}" dt="2021-08-20T15:21:02.985" v="455" actId="20577"/>
-        <pc:sldMkLst>
-          <pc:docMk/>
-          <pc:sldMk cId="2754829911" sldId="305"/>
-        </pc:sldMkLst>
-        <pc:spChg chg="mod">
-          <ac:chgData name="Di Mattia Alessandro Edoardo Giorgio David" userId="f8954a66-e5ad-4a1c-9536-1d2117047f5f" providerId="ADAL" clId="{AC787D5D-10B8-4750-885F-805D7C9E9737}" dt="2021-08-20T15:16:02.926" v="427" actId="122"/>
-          <ac:spMkLst>
-            <pc:docMk/>
-            <pc:sldMk cId="2754829911" sldId="305"/>
-            <ac:spMk id="2" creationId="{11C634F8-0591-458A-96D5-622BD02845C3}"/>
-          </ac:spMkLst>
-        </pc:spChg>
-        <pc:spChg chg="mod">
-          <ac:chgData name="Di Mattia Alessandro Edoardo Giorgio David" userId="f8954a66-e5ad-4a1c-9536-1d2117047f5f" providerId="ADAL" clId="{AC787D5D-10B8-4750-885F-805D7C9E9737}" dt="2021-08-20T15:21:02.985" v="455" actId="20577"/>
-          <ac:spMkLst>
-            <pc:docMk/>
-            <pc:sldMk cId="2754829911" sldId="305"/>
-            <ac:spMk id="3" creationId="{D47B4779-A817-46F6-AAA3-146DBB18D8B5}"/>
-          </ac:spMkLst>
-        </pc:spChg>
-      </pc:sldChg>
-    </pc:docChg>
-  </pc:docChgLst>
-  <pc:docChgLst>
-    <pc:chgData name="Di Mattia Alessandro Edoardo Giorgio David" userId="f8954a66-e5ad-4a1c-9536-1d2117047f5f" providerId="ADAL" clId="{96580939-3941-4AA9-9C7B-12A6F94E39B6}"/>
-    <pc:docChg chg="modSld">
-      <pc:chgData name="Di Mattia Alessandro Edoardo Giorgio David" userId="f8954a66-e5ad-4a1c-9536-1d2117047f5f" providerId="ADAL" clId="{96580939-3941-4AA9-9C7B-12A6F94E39B6}" dt="2021-10-11T07:59:22.819" v="0" actId="1076"/>
-      <pc:docMkLst>
-        <pc:docMk/>
-      </pc:docMkLst>
-      <pc:sldChg chg="modSp mod">
-        <pc:chgData name="Di Mattia Alessandro Edoardo Giorgio David" userId="f8954a66-e5ad-4a1c-9536-1d2117047f5f" providerId="ADAL" clId="{96580939-3941-4AA9-9C7B-12A6F94E39B6}" dt="2021-10-11T07:59:22.819" v="0" actId="1076"/>
-        <pc:sldMkLst>
-          <pc:docMk/>
-          <pc:sldMk cId="2825981100" sldId="284"/>
-        </pc:sldMkLst>
-        <pc:picChg chg="mod">
-          <ac:chgData name="Di Mattia Alessandro Edoardo Giorgio David" userId="f8954a66-e5ad-4a1c-9536-1d2117047f5f" providerId="ADAL" clId="{96580939-3941-4AA9-9C7B-12A6F94E39B6}" dt="2021-10-11T07:59:22.819" v="0" actId="1076"/>
-          <ac:picMkLst>
-            <pc:docMk/>
-            <pc:sldMk cId="2825981100" sldId="284"/>
-            <ac:picMk id="5" creationId="{A194120F-38EF-4FAB-9037-50EAE8E371C5}"/>
-          </ac:picMkLst>
-        </pc:picChg>
-      </pc:sldChg>
-    </pc:docChg>
-  </pc:docChgLst>
-  <pc:docChgLst>
     <pc:chgData name="Di Mattia Alessandro Edoardo Giorgio David" userId="f8954a66-e5ad-4a1c-9536-1d2117047f5f" providerId="ADAL" clId="{CDD3A680-70A0-4B3B-95E5-5D6AACE401AF}"/>
     <pc:docChg chg="undo custSel addSld delSld modSld modMainMaster">
       <pc:chgData name="Di Mattia Alessandro Edoardo Giorgio David" userId="f8954a66-e5ad-4a1c-9536-1d2117047f5f" providerId="ADAL" clId="{CDD3A680-70A0-4B3B-95E5-5D6AACE401AF}" dt="2021-09-20T07:53:19.585" v="11546" actId="20577"/>
@@ -1973,6 +1732,223 @@
     </pc:docChg>
   </pc:docChgLst>
   <pc:docChgLst>
+    <pc:chgData name="Di Mattia Alessandro Edoardo Giorgio David" userId="f8954a66-e5ad-4a1c-9536-1d2117047f5f" providerId="ADAL" clId="{AC787D5D-10B8-4750-885F-805D7C9E9737}"/>
+    <pc:docChg chg="undo custSel addSld modSld">
+      <pc:chgData name="Di Mattia Alessandro Edoardo Giorgio David" userId="f8954a66-e5ad-4a1c-9536-1d2117047f5f" providerId="ADAL" clId="{AC787D5D-10B8-4750-885F-805D7C9E9737}" dt="2021-08-20T15:21:02.985" v="455" actId="20577"/>
+      <pc:docMkLst>
+        <pc:docMk/>
+      </pc:docMkLst>
+      <pc:sldChg chg="modSp new mod">
+        <pc:chgData name="Di Mattia Alessandro Edoardo Giorgio David" userId="f8954a66-e5ad-4a1c-9536-1d2117047f5f" providerId="ADAL" clId="{AC787D5D-10B8-4750-885F-805D7C9E9737}" dt="2021-08-20T14:45:37.819" v="298" actId="20577"/>
+        <pc:sldMkLst>
+          <pc:docMk/>
+          <pc:sldMk cId="3870998453" sldId="298"/>
+        </pc:sldMkLst>
+        <pc:spChg chg="mod">
+          <ac:chgData name="Di Mattia Alessandro Edoardo Giorgio David" userId="f8954a66-e5ad-4a1c-9536-1d2117047f5f" providerId="ADAL" clId="{AC787D5D-10B8-4750-885F-805D7C9E9737}" dt="2021-08-20T14:38:55.348" v="14" actId="122"/>
+          <ac:spMkLst>
+            <pc:docMk/>
+            <pc:sldMk cId="3870998453" sldId="298"/>
+            <ac:spMk id="2" creationId="{CC70B360-B3ED-43E5-A748-F5B5C403C878}"/>
+          </ac:spMkLst>
+        </pc:spChg>
+        <pc:spChg chg="mod">
+          <ac:chgData name="Di Mattia Alessandro Edoardo Giorgio David" userId="f8954a66-e5ad-4a1c-9536-1d2117047f5f" providerId="ADAL" clId="{AC787D5D-10B8-4750-885F-805D7C9E9737}" dt="2021-08-20T14:45:37.819" v="298" actId="20577"/>
+          <ac:spMkLst>
+            <pc:docMk/>
+            <pc:sldMk cId="3870998453" sldId="298"/>
+            <ac:spMk id="3" creationId="{7AB3AA8F-0BE3-46AB-A9D7-309F7F97E4C0}"/>
+          </ac:spMkLst>
+        </pc:spChg>
+      </pc:sldChg>
+      <pc:sldChg chg="addSp delSp modSp new mod modClrScheme chgLayout">
+        <pc:chgData name="Di Mattia Alessandro Edoardo Giorgio David" userId="f8954a66-e5ad-4a1c-9536-1d2117047f5f" providerId="ADAL" clId="{AC787D5D-10B8-4750-885F-805D7C9E9737}" dt="2021-08-20T14:46:06.034" v="304"/>
+        <pc:sldMkLst>
+          <pc:docMk/>
+          <pc:sldMk cId="316752284" sldId="299"/>
+        </pc:sldMkLst>
+        <pc:spChg chg="del">
+          <ac:chgData name="Di Mattia Alessandro Edoardo Giorgio David" userId="f8954a66-e5ad-4a1c-9536-1d2117047f5f" providerId="ADAL" clId="{AC787D5D-10B8-4750-885F-805D7C9E9737}" dt="2021-08-20T14:46:03.679" v="303" actId="700"/>
+          <ac:spMkLst>
+            <pc:docMk/>
+            <pc:sldMk cId="316752284" sldId="299"/>
+            <ac:spMk id="2" creationId="{D510B283-081F-43CE-96F6-08C288F3DFFB}"/>
+          </ac:spMkLst>
+        </pc:spChg>
+        <pc:spChg chg="del mod">
+          <ac:chgData name="Di Mattia Alessandro Edoardo Giorgio David" userId="f8954a66-e5ad-4a1c-9536-1d2117047f5f" providerId="ADAL" clId="{AC787D5D-10B8-4750-885F-805D7C9E9737}" dt="2021-08-20T14:46:03.679" v="303" actId="700"/>
+          <ac:spMkLst>
+            <pc:docMk/>
+            <pc:sldMk cId="316752284" sldId="299"/>
+            <ac:spMk id="3" creationId="{61373EFE-DB58-42AD-8DA9-E7D7FBC43DC0}"/>
+          </ac:spMkLst>
+        </pc:spChg>
+        <pc:picChg chg="add">
+          <ac:chgData name="Di Mattia Alessandro Edoardo Giorgio David" userId="f8954a66-e5ad-4a1c-9536-1d2117047f5f" providerId="ADAL" clId="{AC787D5D-10B8-4750-885F-805D7C9E9737}" dt="2021-08-20T14:46:06.034" v="304"/>
+          <ac:picMkLst>
+            <pc:docMk/>
+            <pc:sldMk cId="316752284" sldId="299"/>
+            <ac:picMk id="4" creationId="{34E6A750-E0B8-41C0-A1C7-288A84AD5D95}"/>
+          </ac:picMkLst>
+        </pc:picChg>
+      </pc:sldChg>
+      <pc:sldChg chg="addSp modSp new mod">
+        <pc:chgData name="Di Mattia Alessandro Edoardo Giorgio David" userId="f8954a66-e5ad-4a1c-9536-1d2117047f5f" providerId="ADAL" clId="{AC787D5D-10B8-4750-885F-805D7C9E9737}" dt="2021-08-20T14:51:41.672" v="307" actId="1076"/>
+        <pc:sldMkLst>
+          <pc:docMk/>
+          <pc:sldMk cId="3144966826" sldId="300"/>
+        </pc:sldMkLst>
+        <pc:picChg chg="add mod">
+          <ac:chgData name="Di Mattia Alessandro Edoardo Giorgio David" userId="f8954a66-e5ad-4a1c-9536-1d2117047f5f" providerId="ADAL" clId="{AC787D5D-10B8-4750-885F-805D7C9E9737}" dt="2021-08-20T14:51:41.672" v="307" actId="1076"/>
+          <ac:picMkLst>
+            <pc:docMk/>
+            <pc:sldMk cId="3144966826" sldId="300"/>
+            <ac:picMk id="2" creationId="{E613DE37-F2C5-40EB-9E94-3226883C95DB}"/>
+          </ac:picMkLst>
+        </pc:picChg>
+      </pc:sldChg>
+      <pc:sldChg chg="addSp modSp new mod modClrScheme chgLayout">
+        <pc:chgData name="Di Mattia Alessandro Edoardo Giorgio David" userId="f8954a66-e5ad-4a1c-9536-1d2117047f5f" providerId="ADAL" clId="{AC787D5D-10B8-4750-885F-805D7C9E9737}" dt="2021-08-20T15:09:51.424" v="406" actId="20577"/>
+        <pc:sldMkLst>
+          <pc:docMk/>
+          <pc:sldMk cId="941163814" sldId="301"/>
+        </pc:sldMkLst>
+        <pc:spChg chg="add mod">
+          <ac:chgData name="Di Mattia Alessandro Edoardo Giorgio David" userId="f8954a66-e5ad-4a1c-9536-1d2117047f5f" providerId="ADAL" clId="{AC787D5D-10B8-4750-885F-805D7C9E9737}" dt="2021-08-20T14:59:05.983" v="313" actId="122"/>
+          <ac:spMkLst>
+            <pc:docMk/>
+            <pc:sldMk cId="941163814" sldId="301"/>
+            <ac:spMk id="2" creationId="{03192228-75B4-4CBA-B91B-AFD69837867A}"/>
+          </ac:spMkLst>
+        </pc:spChg>
+        <pc:spChg chg="add mod">
+          <ac:chgData name="Di Mattia Alessandro Edoardo Giorgio David" userId="f8954a66-e5ad-4a1c-9536-1d2117047f5f" providerId="ADAL" clId="{AC787D5D-10B8-4750-885F-805D7C9E9737}" dt="2021-08-20T15:09:51.424" v="406" actId="20577"/>
+          <ac:spMkLst>
+            <pc:docMk/>
+            <pc:sldMk cId="941163814" sldId="301"/>
+            <ac:spMk id="3" creationId="{A954FACC-FED0-4D82-87FB-6B26DCE06EC6}"/>
+          </ac:spMkLst>
+        </pc:spChg>
+      </pc:sldChg>
+      <pc:sldChg chg="addSp delSp modSp new mod">
+        <pc:chgData name="Di Mattia Alessandro Edoardo Giorgio David" userId="f8954a66-e5ad-4a1c-9536-1d2117047f5f" providerId="ADAL" clId="{AC787D5D-10B8-4750-885F-805D7C9E9737}" dt="2021-08-20T15:00:15.602" v="322" actId="14100"/>
+        <pc:sldMkLst>
+          <pc:docMk/>
+          <pc:sldMk cId="1062955294" sldId="302"/>
+        </pc:sldMkLst>
+        <pc:spChg chg="mod">
+          <ac:chgData name="Di Mattia Alessandro Edoardo Giorgio David" userId="f8954a66-e5ad-4a1c-9536-1d2117047f5f" providerId="ADAL" clId="{AC787D5D-10B8-4750-885F-805D7C9E9737}" dt="2021-08-20T15:00:08.576" v="321" actId="122"/>
+          <ac:spMkLst>
+            <pc:docMk/>
+            <pc:sldMk cId="1062955294" sldId="302"/>
+            <ac:spMk id="2" creationId="{25EF509A-071D-411C-A0B0-D4208223146E}"/>
+          </ac:spMkLst>
+        </pc:spChg>
+        <pc:spChg chg="del">
+          <ac:chgData name="Di Mattia Alessandro Edoardo Giorgio David" userId="f8954a66-e5ad-4a1c-9536-1d2117047f5f" providerId="ADAL" clId="{AC787D5D-10B8-4750-885F-805D7C9E9737}" dt="2021-08-20T14:59:42.063" v="318"/>
+          <ac:spMkLst>
+            <pc:docMk/>
+            <pc:sldMk cId="1062955294" sldId="302"/>
+            <ac:spMk id="3" creationId="{BE19CB99-A33A-4A01-9905-9D0C3914D9D2}"/>
+          </ac:spMkLst>
+        </pc:spChg>
+        <pc:picChg chg="add mod">
+          <ac:chgData name="Di Mattia Alessandro Edoardo Giorgio David" userId="f8954a66-e5ad-4a1c-9536-1d2117047f5f" providerId="ADAL" clId="{AC787D5D-10B8-4750-885F-805D7C9E9737}" dt="2021-08-20T15:00:15.602" v="322" actId="14100"/>
+          <ac:picMkLst>
+            <pc:docMk/>
+            <pc:sldMk cId="1062955294" sldId="302"/>
+            <ac:picMk id="4" creationId="{5ED3C2D6-63C5-460B-A836-842FEB2B0177}"/>
+          </ac:picMkLst>
+        </pc:picChg>
+      </pc:sldChg>
+      <pc:sldChg chg="modSp new mod">
+        <pc:chgData name="Di Mattia Alessandro Edoardo Giorgio David" userId="f8954a66-e5ad-4a1c-9536-1d2117047f5f" providerId="ADAL" clId="{AC787D5D-10B8-4750-885F-805D7C9E9737}" dt="2021-08-20T15:09:36.335" v="398" actId="14"/>
+        <pc:sldMkLst>
+          <pc:docMk/>
+          <pc:sldMk cId="2044962240" sldId="303"/>
+        </pc:sldMkLst>
+        <pc:spChg chg="mod">
+          <ac:chgData name="Di Mattia Alessandro Edoardo Giorgio David" userId="f8954a66-e5ad-4a1c-9536-1d2117047f5f" providerId="ADAL" clId="{AC787D5D-10B8-4750-885F-805D7C9E9737}" dt="2021-08-20T15:00:32.711" v="325" actId="122"/>
+          <ac:spMkLst>
+            <pc:docMk/>
+            <pc:sldMk cId="2044962240" sldId="303"/>
+            <ac:spMk id="2" creationId="{29243411-1081-421F-B743-6D9D5E11545B}"/>
+          </ac:spMkLst>
+        </pc:spChg>
+        <pc:spChg chg="mod">
+          <ac:chgData name="Di Mattia Alessandro Edoardo Giorgio David" userId="f8954a66-e5ad-4a1c-9536-1d2117047f5f" providerId="ADAL" clId="{AC787D5D-10B8-4750-885F-805D7C9E9737}" dt="2021-08-20T15:09:36.335" v="398" actId="14"/>
+          <ac:spMkLst>
+            <pc:docMk/>
+            <pc:sldMk cId="2044962240" sldId="303"/>
+            <ac:spMk id="3" creationId="{2A3AA81C-414F-4D7B-9C0E-C805FF24F569}"/>
+          </ac:spMkLst>
+        </pc:spChg>
+      </pc:sldChg>
+      <pc:sldChg chg="addSp delSp modSp new mod">
+        <pc:chgData name="Di Mattia Alessandro Edoardo Giorgio David" userId="f8954a66-e5ad-4a1c-9536-1d2117047f5f" providerId="ADAL" clId="{AC787D5D-10B8-4750-885F-805D7C9E9737}" dt="2021-08-20T15:12:13.433" v="412"/>
+        <pc:sldMkLst>
+          <pc:docMk/>
+          <pc:sldMk cId="3567292898" sldId="304"/>
+        </pc:sldMkLst>
+        <pc:spChg chg="mod">
+          <ac:chgData name="Di Mattia Alessandro Edoardo Giorgio David" userId="f8954a66-e5ad-4a1c-9536-1d2117047f5f" providerId="ADAL" clId="{AC787D5D-10B8-4750-885F-805D7C9E9737}" dt="2021-08-20T15:10:13.213" v="409" actId="122"/>
+          <ac:spMkLst>
+            <pc:docMk/>
+            <pc:sldMk cId="3567292898" sldId="304"/>
+            <ac:spMk id="2" creationId="{B9A891B8-FCF3-4D10-8095-90B579A3DB40}"/>
+          </ac:spMkLst>
+        </pc:spChg>
+        <pc:spChg chg="add del">
+          <ac:chgData name="Di Mattia Alessandro Edoardo Giorgio David" userId="f8954a66-e5ad-4a1c-9536-1d2117047f5f" providerId="ADAL" clId="{AC787D5D-10B8-4750-885F-805D7C9E9737}" dt="2021-08-20T15:12:13.433" v="412"/>
+          <ac:spMkLst>
+            <pc:docMk/>
+            <pc:sldMk cId="3567292898" sldId="304"/>
+            <ac:spMk id="3" creationId="{DB645B7F-AD3D-4CAA-AD5D-BE21722A27B2}"/>
+          </ac:spMkLst>
+        </pc:spChg>
+        <pc:picChg chg="add del mod">
+          <ac:chgData name="Di Mattia Alessandro Edoardo Giorgio David" userId="f8954a66-e5ad-4a1c-9536-1d2117047f5f" providerId="ADAL" clId="{AC787D5D-10B8-4750-885F-805D7C9E9737}" dt="2021-08-20T15:11:48.619" v="411"/>
+          <ac:picMkLst>
+            <pc:docMk/>
+            <pc:sldMk cId="3567292898" sldId="304"/>
+            <ac:picMk id="4" creationId="{A0D49A57-9517-4AB9-A940-65FDCC83E125}"/>
+          </ac:picMkLst>
+        </pc:picChg>
+        <pc:picChg chg="add mod">
+          <ac:chgData name="Di Mattia Alessandro Edoardo Giorgio David" userId="f8954a66-e5ad-4a1c-9536-1d2117047f5f" providerId="ADAL" clId="{AC787D5D-10B8-4750-885F-805D7C9E9737}" dt="2021-08-20T15:12:13.433" v="412"/>
+          <ac:picMkLst>
+            <pc:docMk/>
+            <pc:sldMk cId="3567292898" sldId="304"/>
+            <ac:picMk id="5" creationId="{4596526A-0688-4381-B13F-22A6737478DA}"/>
+          </ac:picMkLst>
+        </pc:picChg>
+      </pc:sldChg>
+      <pc:sldChg chg="modSp new mod">
+        <pc:chgData name="Di Mattia Alessandro Edoardo Giorgio David" userId="f8954a66-e5ad-4a1c-9536-1d2117047f5f" providerId="ADAL" clId="{AC787D5D-10B8-4750-885F-805D7C9E9737}" dt="2021-08-20T15:21:02.985" v="455" actId="20577"/>
+        <pc:sldMkLst>
+          <pc:docMk/>
+          <pc:sldMk cId="2754829911" sldId="305"/>
+        </pc:sldMkLst>
+        <pc:spChg chg="mod">
+          <ac:chgData name="Di Mattia Alessandro Edoardo Giorgio David" userId="f8954a66-e5ad-4a1c-9536-1d2117047f5f" providerId="ADAL" clId="{AC787D5D-10B8-4750-885F-805D7C9E9737}" dt="2021-08-20T15:16:02.926" v="427" actId="122"/>
+          <ac:spMkLst>
+            <pc:docMk/>
+            <pc:sldMk cId="2754829911" sldId="305"/>
+            <ac:spMk id="2" creationId="{11C634F8-0591-458A-96D5-622BD02845C3}"/>
+          </ac:spMkLst>
+        </pc:spChg>
+        <pc:spChg chg="mod">
+          <ac:chgData name="Di Mattia Alessandro Edoardo Giorgio David" userId="f8954a66-e5ad-4a1c-9536-1d2117047f5f" providerId="ADAL" clId="{AC787D5D-10B8-4750-885F-805D7C9E9737}" dt="2021-08-20T15:21:02.985" v="455" actId="20577"/>
+          <ac:spMkLst>
+            <pc:docMk/>
+            <pc:sldMk cId="2754829911" sldId="305"/>
+            <ac:spMk id="3" creationId="{D47B4779-A817-46F6-AAA3-146DBB18D8B5}"/>
+          </ac:spMkLst>
+        </pc:spChg>
+      </pc:sldChg>
+    </pc:docChg>
+  </pc:docChgLst>
+  <pc:docChgLst>
     <pc:chgData name="Alessandro Edoardo Giorgio David" userId="f8954a66-e5ad-4a1c-9536-1d2117047f5f" providerId="ADAL" clId="{D93D8B19-FA20-47A5-B3D7-0A6BF3F53C46}"/>
     <pc:docChg chg="undo custSel addSld delSld modSld sldOrd">
       <pc:chgData name="Alessandro Edoardo Giorgio David" userId="f8954a66-e5ad-4a1c-9536-1d2117047f5f" providerId="ADAL" clId="{D93D8B19-FA20-47A5-B3D7-0A6BF3F53C46}" dt="2021-08-10T13:18:36.419" v="625"/>
@@ -2767,6 +2743,30 @@
             <ac:spMk id="3" creationId="{2D430180-4BB9-4AD7-AA64-E3AA96044BF1}"/>
           </ac:spMkLst>
         </pc:spChg>
+      </pc:sldChg>
+    </pc:docChg>
+  </pc:docChgLst>
+  <pc:docChgLst>
+    <pc:chgData name="Di Mattia Alessandro Edoardo Giorgio David" userId="f8954a66-e5ad-4a1c-9536-1d2117047f5f" providerId="ADAL" clId="{96580939-3941-4AA9-9C7B-12A6F94E39B6}"/>
+    <pc:docChg chg="modSld">
+      <pc:chgData name="Di Mattia Alessandro Edoardo Giorgio David" userId="f8954a66-e5ad-4a1c-9536-1d2117047f5f" providerId="ADAL" clId="{96580939-3941-4AA9-9C7B-12A6F94E39B6}" dt="2021-10-11T07:59:22.819" v="0" actId="1076"/>
+      <pc:docMkLst>
+        <pc:docMk/>
+      </pc:docMkLst>
+      <pc:sldChg chg="modSp mod">
+        <pc:chgData name="Di Mattia Alessandro Edoardo Giorgio David" userId="f8954a66-e5ad-4a1c-9536-1d2117047f5f" providerId="ADAL" clId="{96580939-3941-4AA9-9C7B-12A6F94E39B6}" dt="2021-10-11T07:59:22.819" v="0" actId="1076"/>
+        <pc:sldMkLst>
+          <pc:docMk/>
+          <pc:sldMk cId="2825981100" sldId="284"/>
+        </pc:sldMkLst>
+        <pc:picChg chg="mod">
+          <ac:chgData name="Di Mattia Alessandro Edoardo Giorgio David" userId="f8954a66-e5ad-4a1c-9536-1d2117047f5f" providerId="ADAL" clId="{96580939-3941-4AA9-9C7B-12A6F94E39B6}" dt="2021-10-11T07:59:22.819" v="0" actId="1076"/>
+          <ac:picMkLst>
+            <pc:docMk/>
+            <pc:sldMk cId="2825981100" sldId="284"/>
+            <ac:picMk id="5" creationId="{A194120F-38EF-4FAB-9037-50EAE8E371C5}"/>
+          </ac:picMkLst>
+        </pc:picChg>
       </pc:sldChg>
     </pc:docChg>
   </pc:docChgLst>
@@ -4437,7 +4437,7 @@
           <a:p>
             <a:fld id="{2A8A781A-1859-4C85-BF75-12C8100C455E}" type="datetimeFigureOut">
               <a:rPr lang="nb-NO" smtClean="0"/>
-              <a:t>11.10.2021</a:t>
+              <a:t>10.09.2026</a:t>
             </a:fld>
             <a:endParaRPr lang="nb-NO" dirty="0"/>
           </a:p>
@@ -4614,7 +4614,7 @@
           <a:p>
             <a:fld id="{8B442447-825E-F44A-AE66-BBD0FC2F1FF6}" type="datetimeFigureOut">
               <a:rPr lang="nb-NO" smtClean="0"/>
-              <a:t>11.10.2021</a:t>
+              <a:t>10.09.2026</a:t>
             </a:fld>
             <a:endParaRPr lang="nb-NO" dirty="0"/>
           </a:p>
@@ -12961,7 +12961,7 @@
           <a:p>
             <a:r>
               <a:rPr lang="it-IT" dirty="0"/>
-              <a:t>As the price of a sold goods rises, profitability decreases: leading to a decrease in the quantity of good supplied </a:t>
+              <a:t>As the price of an input used to produce the good rises, profitability decreases: leading to a decrease in the quantity of good supplied </a:t>
             </a:r>
             <a:r>
               <a:rPr lang="it-IT" u="sng" dirty="0"/>
@@ -13219,7 +13219,7 @@
             </a:r>
             <a:r>
               <a:rPr lang="en-US" sz="2400" dirty="0"/>
-              <a:t>: Other things equal, when the price of a good rises, the quantity supplied of good also rises and vise versa.</a:t>
+              <a:t>: Other things equal, when the price of a good rises, the quantity supplied of good (output price) also rises and vise versa.</a:t>
             </a:r>
           </a:p>
           <a:p>
@@ -13414,7 +13414,7 @@
           <a:p>
             <a:r>
               <a:rPr lang="it-IT" sz="2400" dirty="0"/>
-              <a:t>The Supply curve shows the correlation between the cost of a good or service and the quantity supplied for a given period </a:t>
+              <a:t>The Supply curve shows the correlation between the price of a good or service and the quantity supplied for a given period </a:t>
             </a:r>
             <a:endParaRPr lang="en-US" sz="2400" dirty="0"/>
           </a:p>
@@ -13613,7 +13613,7 @@
           <a:p>
             <a:r>
               <a:rPr lang="it-IT" sz="2400" dirty="0"/>
-              <a:t>Market Supply is the aggregation of different indivual supplies</a:t>
+              <a:t>Market Supply is the aggregation of different individual supplies</a:t>
             </a:r>
           </a:p>
           <a:p>
@@ -13772,7 +13772,7 @@
             <a:pPr algn="ctr"/>
             <a:r>
               <a:rPr lang="it-IT" dirty="0"/>
-              <a:t>Individual Supply is relatively steepr while Market Supply is relatively flatter</a:t>
+              <a:t>Individual Supply is relatively steeper while Market Supply is relatively flatter</a:t>
             </a:r>
             <a:endParaRPr lang="en-US" dirty="0"/>
           </a:p>
@@ -15719,21 +15719,6 @@
 </file>
 
 <file path=customXml/item1.xml><?xml version="1.0" encoding="utf-8"?>
-<p:properties xmlns:p="http://schemas.microsoft.com/office/2006/metadata/properties" xmlns:xsi="http://www.w3.org/2001/XMLSchema-instance" xmlns:pc="http://schemas.microsoft.com/office/infopath/2007/PartnerControls">
-  <documentManagement/>
-</p:properties>
-</file>
-
-<file path=customXml/item2.xml><?xml version="1.0" encoding="utf-8"?>
-<?mso-contentType ?>
-<FormTemplates xmlns="http://schemas.microsoft.com/sharepoint/v3/contenttype/forms">
-  <Display>DocumentLibraryForm</Display>
-  <Edit>DocumentLibraryForm</Edit>
-  <New>DocumentLibraryForm</New>
-</FormTemplates>
-</file>
-
-<file path=customXml/item3.xml><?xml version="1.0" encoding="utf-8"?>
 <ct:contentTypeSchema xmlns:ct="http://schemas.microsoft.com/office/2006/metadata/contentType" xmlns:ma="http://schemas.microsoft.com/office/2006/metadata/properties/metaAttributes" ct:_="" ma:_="" ma:contentTypeName="Dokument" ma:contentTypeID="0x010100086B82B2E673BB48BBFD907EF88B1F72" ma:contentTypeVersion="0" ma:contentTypeDescription="Opprett et nytt dokument." ma:contentTypeScope="" ma:versionID="0653049da3c7d6103ba0b9e54f21c3f6">
   <xsd:schema xmlns:xsd="http://www.w3.org/2001/XMLSchema" xmlns:xs="http://www.w3.org/2001/XMLSchema" xmlns:p="http://schemas.microsoft.com/office/2006/metadata/properties" targetNamespace="http://schemas.microsoft.com/office/2006/metadata/properties" ma:root="true" ma:fieldsID="3e2500873ed525c1cf306a41cba81ed5">
     <xsd:element name="properties">
@@ -15847,17 +15832,33 @@
 </ct:contentTypeSchema>
 </file>
 
+<file path=customXml/item2.xml><?xml version="1.0" encoding="utf-8"?>
+<?mso-contentType ?>
+<FormTemplates xmlns="http://schemas.microsoft.com/sharepoint/v3/contenttype/forms">
+  <Display>DocumentLibraryForm</Display>
+  <Edit>DocumentLibraryForm</Edit>
+  <New>DocumentLibraryForm</New>
+</FormTemplates>
+</file>
+
+<file path=customXml/item3.xml><?xml version="1.0" encoding="utf-8"?>
+<p:properties xmlns:p="http://schemas.microsoft.com/office/2006/metadata/properties" xmlns:xsi="http://www.w3.org/2001/XMLSchema-instance" xmlns:pc="http://schemas.microsoft.com/office/infopath/2007/PartnerControls">
+  <documentManagement/>
+</p:properties>
+</file>
+
 <file path=customXml/itemProps1.xml><?xml version="1.0" encoding="utf-8"?>
-<ds:datastoreItem xmlns:ds="http://schemas.openxmlformats.org/officeDocument/2006/customXml" ds:itemID="{3CAC7484-FE6E-40E6-83CA-83D55D847BA8}">
+<ds:datastoreItem xmlns:ds="http://schemas.openxmlformats.org/officeDocument/2006/customXml" ds:itemID="{C299F0B8-F1FA-4547-8345-D1C345C8ADDE}">
   <ds:schemaRefs>
-    <ds:schemaRef ds:uri="http://schemas.microsoft.com/office/2006/documentManagement/types"/>
+    <ds:schemaRef ds:uri="http://schemas.microsoft.com/office/2006/metadata/contentType"/>
+    <ds:schemaRef ds:uri="http://schemas.microsoft.com/office/2006/metadata/properties/metaAttributes"/>
+    <ds:schemaRef ds:uri="http://www.w3.org/2001/XMLSchema"/>
     <ds:schemaRef ds:uri="http://schemas.microsoft.com/office/2006/metadata/properties"/>
+    <ds:schemaRef ds:uri="http://schemas.openxmlformats.org/package/2006/metadata/core-properties"/>
+    <ds:schemaRef ds:uri="http://purl.org/dc/elements/1.1/"/>
+    <ds:schemaRef ds:uri="http://purl.org/dc/terms/"/>
+    <ds:schemaRef ds:uri="http://schemas.microsoft.com/internal/obd"/>
     <ds:schemaRef ds:uri="http://schemas.microsoft.com/office/infopath/2007/PartnerControls"/>
-    <ds:schemaRef ds:uri="http://schemas.openxmlformats.org/package/2006/metadata/core-properties"/>
-    <ds:schemaRef ds:uri="http://purl.org/dc/dcmitype/"/>
-    <ds:schemaRef ds:uri="http://purl.org/dc/terms/"/>
-    <ds:schemaRef ds:uri="http://www.w3.org/XML/1998/namespace"/>
-    <ds:schemaRef ds:uri="http://purl.org/dc/elements/1.1/"/>
   </ds:schemaRefs>
 </ds:datastoreItem>
 </file>
@@ -15871,17 +15872,16 @@
 </file>
 
 <file path=customXml/itemProps3.xml><?xml version="1.0" encoding="utf-8"?>
-<ds:datastoreItem xmlns:ds="http://schemas.openxmlformats.org/officeDocument/2006/customXml" ds:itemID="{C299F0B8-F1FA-4547-8345-D1C345C8ADDE}">
+<ds:datastoreItem xmlns:ds="http://schemas.openxmlformats.org/officeDocument/2006/customXml" ds:itemID="{3CAC7484-FE6E-40E6-83CA-83D55D847BA8}">
   <ds:schemaRefs>
-    <ds:schemaRef ds:uri="http://schemas.microsoft.com/office/2006/metadata/contentType"/>
-    <ds:schemaRef ds:uri="http://schemas.microsoft.com/office/2006/metadata/properties/metaAttributes"/>
-    <ds:schemaRef ds:uri="http://www.w3.org/2001/XMLSchema"/>
+    <ds:schemaRef ds:uri="http://schemas.microsoft.com/office/2006/documentManagement/types"/>
     <ds:schemaRef ds:uri="http://schemas.microsoft.com/office/2006/metadata/properties"/>
+    <ds:schemaRef ds:uri="http://schemas.microsoft.com/office/infopath/2007/PartnerControls"/>
     <ds:schemaRef ds:uri="http://schemas.openxmlformats.org/package/2006/metadata/core-properties"/>
+    <ds:schemaRef ds:uri="http://purl.org/dc/dcmitype/"/>
+    <ds:schemaRef ds:uri="http://purl.org/dc/terms/"/>
+    <ds:schemaRef ds:uri="http://www.w3.org/XML/1998/namespace"/>
     <ds:schemaRef ds:uri="http://purl.org/dc/elements/1.1/"/>
-    <ds:schemaRef ds:uri="http://purl.org/dc/terms/"/>
-    <ds:schemaRef ds:uri="http://schemas.microsoft.com/internal/obd"/>
-    <ds:schemaRef ds:uri="http://schemas.microsoft.com/office/infopath/2007/PartnerControls"/>
   </ds:schemaRefs>
 </ds:datastoreItem>
 </file>